--- a/Denver/Common-Altitude-2027/decks/02-Art-Partners.pptx
+++ b/Denver/Common-Altitude-2027/decks/02-Art-Partners.pptx
@@ -539,7 +539,7 @@
           <a:p/>
           <a:p>
             <a:r>
-              <a:t>Status: working proposal; site/date/partners/funding/capacities unconfirmed. No external action is authorized by the deck.</a:t>
+              <a:t>Status: working proposal. Site, dates, partners, funding and capacity need confirmation. The deck grants no external-action authority.</a:t>
             </a:r>
           </a:p>
           <a:p>
@@ -629,13 +629,13 @@
           </a:p>
           <a:p>
             <a:r>
-              <a:t>Make the service worthy of the work.</a:t>
+              <a:t>Artwork care and seller service</a:t>
             </a:r>
           </a:p>
           <a:p/>
           <a:p>
             <a:r>
-              <a:t>The producer/registrar/seller agreement defines responsibility.</a:t>
+              <a:t>The producer, registrar and seller must agree each responsibility.</a:t>
             </a:r>
           </a:p>
           <a:p/>
@@ -657,7 +657,7 @@
           <a:p/>
           <a:p>
             <a:r>
-              <a:t>Status: working proposal; site/date/partners/funding/capacities unconfirmed. No external action is authorized by the deck.</a:t>
+              <a:t>Status: working proposal. Site, dates, partners, funding and capacity need confirmation. The deck grants no external-action authority.</a:t>
             </a:r>
           </a:p>
           <a:p>
@@ -747,13 +747,13 @@
           </a:p>
           <a:p>
             <a:r>
-              <a:t>Rights and independence.</a:t>
+              <a:t>Artist rights and selection rules</a:t>
             </a:r>
           </a:p>
           <a:p/>
           <a:p>
             <a:r>
-              <a:t>Nothing is acquired by placing a name on a research list.</a:t>
+              <a:t>Researching a name grants no rights or participation commitment.</a:t>
             </a:r>
           </a:p>
           <a:p/>
@@ -775,7 +775,7 @@
           <a:p/>
           <a:p>
             <a:r>
-              <a:t>Status: working proposal; site/date/partners/funding/capacities unconfirmed. No external action is authorized by the deck.</a:t>
+              <a:t>Status: working proposal. Site, dates, partners, funding and capacity need confirmation. The deck grants no external-action authority.</a:t>
             </a:r>
           </a:p>
           <a:p>
@@ -865,13 +865,13 @@
           </a:p>
           <a:p>
             <a:r>
-              <a:t>A staged invitation.</a:t>
+              <a:t>Partner invitation sequence</a:t>
             </a:r>
           </a:p>
           <a:p/>
           <a:p>
             <a:r>
-              <a:t>No deposits, artwork custody or public announcement before the relevant authority and funding.</a:t>
+              <a:t>Secure authority and funds before taking deposits, accepting work or announcing participation.</a:t>
             </a:r>
           </a:p>
           <a:p/>
@@ -898,7 +898,7 @@
           <a:p/>
           <a:p>
             <a:r>
-              <a:t>Status: working proposal; site/date/partners/funding/capacities unconfirmed. No external action is authorized by the deck.</a:t>
+              <a:t>Status: working proposal. Site, dates, partners, funding and capacity need confirmation. The deck grants no external-action authority.</a:t>
             </a:r>
           </a:p>
           <a:p>
@@ -988,13 +988,13 @@
           </a:p>
           <a:p>
             <a:r>
-              <a:t>Consider a specific proposition.</a:t>
+              <a:t>Room and artwork proposals</a:t>
             </a:r>
           </a:p>
           <a:p/>
           <a:p>
             <a:r>
-              <a:t>The next step is a scoped discussion, followed by a conditional room/work proposal if there is a fit.</a:t>
+              <a:t>A paid or appropriately scoped discussion would establish work, terms and delivery needs.</a:t>
             </a:r>
           </a:p>
           <a:p/>
@@ -1016,7 +1016,7 @@
           <a:p/>
           <a:p>
             <a:r>
-              <a:t>Status: working proposal; site/date/partners/funding/capacities unconfirmed. No external action is authorized by the deck.</a:t>
+              <a:t>Status: working proposal. Site, dates, partners, funding and capacity need confirmation. The deck grants no external-action authority.</a:t>
             </a:r>
           </a:p>
           <a:p>
@@ -1106,19 +1106,19 @@
           </a:p>
           <a:p>
             <a:r>
-              <a:t>Research is not a roster.</a:t>
+              <a:t>Candidate research and status</a:t>
             </a:r>
           </a:p>
           <a:p/>
           <a:p>
             <a:r>
-              <a:t>72 geographically organized candidates inform the proposal; none is represented here as a committed partner.</a:t>
+              <a:t>The project has contacted none of the 72 researched candidates.</a:t>
             </a:r>
           </a:p>
           <a:p/>
           <a:p>
             <a:r>
-              <a:t>Official artist/gallery/institution sources are indexed in the document repository.</a:t>
+              <a:t>The document repository lists official artist, gallery and institution sources.</a:t>
             </a:r>
           </a:p>
           <a:p>
@@ -1134,7 +1134,7 @@
           <a:p/>
           <a:p>
             <a:r>
-              <a:t>Status: working proposal; site/date/partners/funding/capacities unconfirmed. No external action is authorized by the deck.</a:t>
+              <a:t>Status: working proposal. Site, dates, partners, funding and capacity need confirmation. The deck grants no external-action authority.</a:t>
             </a:r>
           </a:p>
           <a:p>
@@ -1224,13 +1224,13 @@
           </a:p>
           <a:p>
             <a:r>
-              <a:t>A remarkable place to look. A useful place to sell.</a:t>
+              <a:t>A proposed Denver art fair</a:t>
             </a:r>
           </a:p>
           <a:p/>
           <a:p>
             <a:r>
-              <a:t>An artist-led exhibition and a serious acquisition market, with a generous public welcome.</a:t>
+              <a:t>Artists and galleries would present work for sale alongside commissions and free public programs.</a:t>
             </a:r>
           </a:p>
           <a:p/>
@@ -1252,7 +1252,7 @@
           <a:p/>
           <a:p>
             <a:r>
-              <a:t>Status: working proposal; site/date/partners/funding/capacities unconfirmed. No external action is authorized by the deck.</a:t>
+              <a:t>Status: working proposal. Site, dates, partners, funding and capacity need confirmation. The deck grants no external-action authority.</a:t>
             </a:r>
           </a:p>
           <a:p>
@@ -1342,13 +1342,13 @@
           </a:p>
           <a:p>
             <a:r>
-              <a:t>A room should have a point of view.</a:t>
+              <a:t>Three types of art presentation</a:t>
             </a:r>
           </a:p>
           <a:p/>
           <a:p>
             <a:r>
-              <a:t>The theme is a framework for authorship, not a request to imitate a famous installation.</a:t>
+              <a:t>Artists and curators develop their own work within the event theme.</a:t>
             </a:r>
           </a:p>
           <a:p/>
@@ -1370,7 +1370,7 @@
           <a:p/>
           <a:p>
             <a:r>
-              <a:t>Status: working proposal; site/date/partners/funding/capacities unconfirmed. No external action is authorized by the deck.</a:t>
+              <a:t>Status: working proposal. Site, dates, partners, funding and capacity need confirmation. The deck grants no external-action authority.</a:t>
             </a:r>
           </a:p>
           <a:p>
@@ -1460,13 +1460,13 @@
           </a:p>
           <a:p>
             <a:r>
-              <a:t>A proposed 60-space edition.</a:t>
+              <a:t>Proposed allocation of 60 spaces</a:t>
             </a:r>
           </a:p>
           <a:p/>
           <a:p>
             <a:r>
-              <a:t>The functional inventory will be adapted to a surveyed approved footprint.</a:t>
+              <a:t>A survey and site approval must establish how these functions fit.</a:t>
             </a:r>
           </a:p>
           <a:p/>
@@ -1493,7 +1493,7 @@
           <a:p/>
           <a:p>
             <a:r>
-              <a:t>Status: working proposal; site/date/partners/funding/capacities unconfirmed. No external action is authorized by the deck.</a:t>
+              <a:t>Status: working proposal. Site, dates, partners, funding and capacity need confirmation. The deck grants no external-action authority.</a:t>
             </a:r>
           </a:p>
           <a:p>
@@ -1583,24 +1583,24 @@
           </a:p>
           <a:p>
             <a:r>
-              <a:t>Artist economics in plain language.</a:t>
+              <a:t>Artist fees and sale proceeds</a:t>
             </a:r>
           </a:p>
           <a:p/>
           <a:p>
             <a:r>
-              <a:t>No organizer art commission is assumed in the proposal.</a:t>
+              <a:t>The proposal charges zero organizer art commission and budgets pay for commissioned work.</a:t>
             </a:r>
           </a:p>
           <a:p/>
           <a:p>
             <a:r>
-              <a:t>Seller proceeds / Sales remain with the authorized seller; representation, tax and external costs are disclosed.</a:t>
-            </a:r>
-          </a:p>
-          <a:p>
-            <a:r>
-              <a:t>Paid work / Commissions, teaching and direct-artist scopes are funded contracts, not exposure promises.</a:t>
+              <a:t>Seller proceeds / The seller receives sale proceeds and discloses representation, tax and external costs.</a:t>
+            </a:r>
+          </a:p>
+          <a:p>
+            <a:r>
+              <a:t>Paid work / Pay for commissions, teaching and direct-artist work through funded contracts.</a:t>
             </a:r>
           </a:p>
           <a:p>
@@ -1611,7 +1611,7 @@
           <a:p/>
           <a:p>
             <a:r>
-              <a:t>Status: working proposal; site/date/partners/funding/capacities unconfirmed. No external action is authorized by the deck.</a:t>
+              <a:t>Status: working proposal. Site, dates, partners, funding and capacity need confirmation. The deck grants no external-action authority.</a:t>
             </a:r>
           </a:p>
           <a:p>
@@ -1701,24 +1701,24 @@
           </a:p>
           <a:p>
             <a:r>
-              <a:t>A gallery-service offer to test.</a:t>
+              <a:t>Optional gallery services</a:t>
             </a:r>
           </a:p>
           <a:p/>
           <a:p>
             <a:r>
-              <a:t>Optional paid services require a specific value proposition and agreed refund/earning terms.</a:t>
+              <a:t>Define the deliverables and refund terms, then test whether galleries will buy the package.</a:t>
             </a:r>
           </a:p>
           <a:p/>
           <a:p>
             <a:r>
-              <a:t>$7,500 / Illustrative premium-service package</a:t>
-            </a:r>
-          </a:p>
-          <a:p>
-            <a:r>
-              <a:t>24 / Assumed package purchasers; uptake unvalidated</a:t>
+              <a:t>$7,500 / Proposed service-package price</a:t>
+            </a:r>
+          </a:p>
+          <a:p>
+            <a:r>
+              <a:t>24 / Package-purchase assumption. Demand remains unknown</a:t>
             </a:r>
           </a:p>
           <a:p>
@@ -1729,7 +1729,7 @@
           <a:p/>
           <a:p>
             <a:r>
-              <a:t>Status: working proposal; site/date/partners/funding/capacities unconfirmed. No external action is authorized by the deck.</a:t>
+              <a:t>Status: working proposal. Site, dates, partners, funding and capacity need confirmation. The deck grants no external-action authority.</a:t>
             </a:r>
           </a:p>
           <a:p>
@@ -1819,13 +1819,13 @@
           </a:p>
           <a:p>
             <a:r>
-              <a:t>Support direct artists.</a:t>
+              <a:t>Direct-artist salons and stipends</a:t>
             </a:r>
           </a:p>
           <a:p/>
           <a:p>
             <a:r>
-              <a:t>Proposed fee envelopes—not accepted commissions or guaranteed grants.</a:t>
+              <a:t>These fee budgets need accepted scopes and funding before any commission.</a:t>
             </a:r>
           </a:p>
           <a:p/>
@@ -1847,7 +1847,7 @@
           <a:p/>
           <a:p>
             <a:r>
-              <a:t>Status: working proposal; site/date/partners/funding/capacities unconfirmed. No external action is authorized by the deck.</a:t>
+              <a:t>Status: working proposal. Site, dates, partners, funding and capacity need confirmation. The deck grants no external-action authority.</a:t>
             </a:r>
           </a:p>
           <a:p>
@@ -1937,13 +1937,13 @@
           </a:p>
           <a:p>
             <a:r>
-              <a:t>Build a purchase-ready catalogue.</a:t>
+              <a:t>Catalog and buyer targets</a:t>
             </a:r>
           </a:p>
           <a:p/>
           <a:p>
             <a:r>
-              <a:t>Targets depend on signed seller authority, rights and real inventory.</a:t>
+              <a:t>Confirm seller authority, image rights and stock before publishing work.</a:t>
             </a:r>
           </a:p>
           <a:p/>
@@ -1965,7 +1965,7 @@
           <a:p/>
           <a:p>
             <a:r>
-              <a:t>Status: working proposal; site/date/partners/funding/capacities unconfirmed. No external action is authorized by the deck.</a:t>
+              <a:t>Status: working proposal. Site, dates, partners, funding and capacity need confirmation. The deck grants no external-action authority.</a:t>
             </a:r>
           </a:p>
           <a:p>
@@ -2055,13 +2055,13 @@
           </a:p>
           <a:p>
             <a:r>
-              <a:t>Public culture and serious looking.</a:t>
+              <a:t>Preview, public and learning programs</a:t>
             </a:r>
           </a:p>
           <a:p/>
           <a:p>
             <a:r>
-              <a:t>A proposed seven-day rhythm supports professional attention and broader discovery.</a:t>
+              <a:t>The proposed week gives buyers appointment time and visitors free access to core art.</a:t>
             </a:r>
           </a:p>
           <a:p/>
@@ -2083,7 +2083,7 @@
           <a:p/>
           <a:p>
             <a:r>
-              <a:t>Status: working proposal; site/date/partners/funding/capacities unconfirmed. No external action is authorized by the deck.</a:t>
+              <a:t>Status: working proposal. Site, dates, partners, funding and capacity need confirmation. The deck grants no external-action authority.</a:t>
             </a:r>
           </a:p>
           <a:p>
@@ -5969,7 +5969,7 @@
               </a:defRPr>
             </a:pPr>
             <a:r>
-              <a:t>Make the service worthy of the work.</a:t>
+              <a:t>Artwork care and seller service</a:t>
             </a:r>
           </a:p>
         </p:txBody>
@@ -6014,7 +6014,7 @@
               </a:defRPr>
             </a:pPr>
             <a:r>
-              <a:t>The producer/registrar/seller agreement defines responsibility.</a:t>
+              <a:t>The producer, registrar and seller must agree each responsibility.</a:t>
             </a:r>
           </a:p>
         </p:txBody>
@@ -6946,7 +6946,7 @@
               </a:defRPr>
             </a:pPr>
             <a:r>
-              <a:t>Rights and independence.</a:t>
+              <a:t>Artist rights and selection rules</a:t>
             </a:r>
           </a:p>
         </p:txBody>
@@ -6991,7 +6991,7 @@
               </a:defRPr>
             </a:pPr>
             <a:r>
-              <a:t>Nothing is acquired by placing a name on a research list.</a:t>
+              <a:t>Researching a name grants no rights or participation commitment.</a:t>
             </a:r>
           </a:p>
         </p:txBody>
@@ -7879,7 +7879,7 @@
               </a:defRPr>
             </a:pPr>
             <a:r>
-              <a:t>A staged invitation.</a:t>
+              <a:t>Partner invitation sequence</a:t>
             </a:r>
           </a:p>
         </p:txBody>
@@ -7924,7 +7924,7 @@
               </a:defRPr>
             </a:pPr>
             <a:r>
-              <a:t>No deposits, artwork custody or public announcement before the relevant authority and funding.</a:t>
+              <a:t>Secure authority and funds before taking deposits, accepting work or announcing participation.</a:t>
             </a:r>
           </a:p>
         </p:txBody>
@@ -9076,9 +9076,32 @@
               </a:defRPr>
             </a:pPr>
             <a:r>
-              <a:t>Consider a specific</a:t>
-            </a:r>
-          </a:p>
+              <a:t>Room and artwork proposals</a:t>
+            </a:r>
+          </a:p>
+        </p:txBody>
+      </p:sp>
+      <p:sp>
+        <p:nvSpPr>
+          <p:cNvPr id="4" name="TextBox 3"/>
+          <p:cNvSpPr txBox="1"/>
+          <p:nvPr/>
+        </p:nvSpPr>
+        <p:spPr>
+          <a:xfrm>
+            <a:off x="914400" y="2470912"/>
+            <a:ext cx="9601200" cy="1371600"/>
+          </a:xfrm>
+          <a:prstGeom prst="rect">
+            <a:avLst/>
+          </a:prstGeom>
+          <a:noFill/>
+        </p:spPr>
+        <p:txBody>
+          <a:bodyPr wrap="none" lIns="0" rIns="0" tIns="0" bIns="0" anchor="t">
+            <a:spAutoFit/>
+          </a:bodyPr>
+          <a:lstStyle/>
           <a:p>
             <a:pPr>
               <a:lnSpc>
@@ -9090,7 +9113,7 @@
               <a:spcAft>
                 <a:spcPts val="0"/>
               </a:spcAft>
-              <a:defRPr sz="5200" b="1">
+              <a:defRPr sz="2300" b="0">
                 <a:solidFill>
                   <a:srgbClr val="F3F0E9"/>
                 </a:solidFill>
@@ -9098,32 +9121,9 @@
               </a:defRPr>
             </a:pPr>
             <a:r>
-              <a:t>proposition.</a:t>
-            </a:r>
-          </a:p>
-        </p:txBody>
-      </p:sp>
-      <p:sp>
-        <p:nvSpPr>
-          <p:cNvPr id="4" name="TextBox 3"/>
-          <p:cNvSpPr txBox="1"/>
-          <p:nvPr/>
-        </p:nvSpPr>
-        <p:spPr>
-          <a:xfrm>
-            <a:off x="914400" y="3250184"/>
-            <a:ext cx="9601200" cy="1371600"/>
-          </a:xfrm>
-          <a:prstGeom prst="rect">
-            <a:avLst/>
-          </a:prstGeom>
-          <a:noFill/>
-        </p:spPr>
-        <p:txBody>
-          <a:bodyPr wrap="none" lIns="0" rIns="0" tIns="0" bIns="0" anchor="t">
-            <a:spAutoFit/>
-          </a:bodyPr>
-          <a:lstStyle/>
+              <a:t>A paid or appropriately scoped discussion would establish work, terms</a:t>
+            </a:r>
+          </a:p>
           <a:p>
             <a:pPr>
               <a:lnSpc>
@@ -9143,29 +9143,7 @@
               </a:defRPr>
             </a:pPr>
             <a:r>
-              <a:t>The next step is a scoped discussion, followed by a conditional room/work</a:t>
-            </a:r>
-          </a:p>
-          <a:p>
-            <a:pPr>
-              <a:lnSpc>
-                <a:spcPct val="108000"/>
-              </a:lnSpc>
-              <a:spcBef>
-                <a:spcPts val="0"/>
-              </a:spcBef>
-              <a:spcAft>
-                <a:spcPts val="0"/>
-              </a:spcAft>
-              <a:defRPr sz="2300" b="0">
-                <a:solidFill>
-                  <a:srgbClr val="F3F0E9"/>
-                </a:solidFill>
-                <a:latin typeface="Arial"/>
-              </a:defRPr>
-            </a:pPr>
-            <a:r>
-              <a:t>proposal if there is a fit.</a:t>
+              <a:t>and delivery needs.</a:t>
             </a:r>
           </a:p>
         </p:txBody>
@@ -9178,7 +9156,7 @@
         </p:nvSpPr>
         <p:spPr>
           <a:xfrm>
-            <a:off x="914400" y="4259580"/>
+            <a:off x="914400" y="4160520"/>
             <a:ext cx="73152" cy="384048"/>
           </a:xfrm>
           <a:prstGeom prst="rect">
@@ -9221,7 +9199,7 @@
         </p:nvSpPr>
         <p:spPr>
           <a:xfrm>
-            <a:off x="1188720" y="4259580"/>
+            <a:off x="1188720" y="4160520"/>
             <a:ext cx="9235440" cy="640080"/>
           </a:xfrm>
           <a:prstGeom prst="rect">
@@ -9266,7 +9244,7 @@
         </p:nvSpPr>
         <p:spPr>
           <a:xfrm>
-            <a:off x="914400" y="4991100"/>
+            <a:off x="914400" y="4892040"/>
             <a:ext cx="73152" cy="384048"/>
           </a:xfrm>
           <a:prstGeom prst="rect">
@@ -9309,7 +9287,7 @@
         </p:nvSpPr>
         <p:spPr>
           <a:xfrm>
-            <a:off x="1188720" y="4991100"/>
+            <a:off x="1188720" y="4892040"/>
             <a:ext cx="9235440" cy="640080"/>
           </a:xfrm>
           <a:prstGeom prst="rect">
@@ -9354,7 +9332,7 @@
         </p:nvSpPr>
         <p:spPr>
           <a:xfrm>
-            <a:off x="914400" y="5722620"/>
+            <a:off x="914400" y="5623560"/>
             <a:ext cx="73152" cy="384048"/>
           </a:xfrm>
           <a:prstGeom prst="rect">
@@ -9397,7 +9375,7 @@
         </p:nvSpPr>
         <p:spPr>
           <a:xfrm>
-            <a:off x="1188720" y="5722620"/>
+            <a:off x="1188720" y="5623560"/>
             <a:ext cx="9235440" cy="640080"/>
           </a:xfrm>
           <a:prstGeom prst="rect">
@@ -10067,7 +10045,7 @@
               </a:defRPr>
             </a:pPr>
             <a:r>
-              <a:t>Research is not a roster.</a:t>
+              <a:t>Candidate research and status</a:t>
             </a:r>
           </a:p>
         </p:txBody>
@@ -10112,7 +10090,7 @@
               </a:defRPr>
             </a:pPr>
             <a:r>
-              <a:t>72 geographically organized candidates inform the proposal; none is represented here as a committed partner.</a:t>
+              <a:t>The project has contacted none of the 72 researched candidates.</a:t>
             </a:r>
           </a:p>
         </p:txBody>
@@ -10202,7 +10180,7 @@
               </a:defRPr>
             </a:pPr>
             <a:r>
-              <a:t>Official artist/gallery/institution sources are indexed in the document repository.</a:t>
+              <a:t>The document repository lists official artist, gallery and institution sources.</a:t>
             </a:r>
           </a:p>
         </p:txBody>
@@ -10676,9 +10654,32 @@
               </a:defRPr>
             </a:pPr>
             <a:r>
-              <a:t>A remarkable place to look.</a:t>
-            </a:r>
-          </a:p>
+              <a:t>A proposed Denver art fair</a:t>
+            </a:r>
+          </a:p>
+        </p:txBody>
+      </p:sp>
+      <p:sp>
+        <p:nvSpPr>
+          <p:cNvPr id="4" name="TextBox 3"/>
+          <p:cNvSpPr txBox="1"/>
+          <p:nvPr/>
+        </p:nvSpPr>
+        <p:spPr>
+          <a:xfrm>
+            <a:off x="914400" y="1887220"/>
+            <a:ext cx="12618720" cy="1005840"/>
+          </a:xfrm>
+          <a:prstGeom prst="rect">
+            <a:avLst/>
+          </a:prstGeom>
+          <a:noFill/>
+        </p:spPr>
+        <p:txBody>
+          <a:bodyPr wrap="none" lIns="0" rIns="0" tIns="0" bIns="0" anchor="t">
+            <a:spAutoFit/>
+          </a:bodyPr>
+          <a:lstStyle/>
           <a:p>
             <a:pPr>
               <a:lnSpc>
@@ -10690,7 +10691,7 @@
               <a:spcAft>
                 <a:spcPts val="0"/>
               </a:spcAft>
-              <a:defRPr sz="5000" b="1">
+              <a:defRPr sz="1900" b="0">
                 <a:solidFill>
                   <a:srgbClr val="151A22"/>
                 </a:solidFill>
@@ -10698,52 +10699,7 @@
               </a:defRPr>
             </a:pPr>
             <a:r>
-              <a:t>A useful place to sell.</a:t>
-            </a:r>
-          </a:p>
-        </p:txBody>
-      </p:sp>
-      <p:sp>
-        <p:nvSpPr>
-          <p:cNvPr id="4" name="TextBox 3"/>
-          <p:cNvSpPr txBox="1"/>
-          <p:nvPr/>
-        </p:nvSpPr>
-        <p:spPr>
-          <a:xfrm>
-            <a:off x="914400" y="2585720"/>
-            <a:ext cx="12618720" cy="1005840"/>
-          </a:xfrm>
-          <a:prstGeom prst="rect">
-            <a:avLst/>
-          </a:prstGeom>
-          <a:noFill/>
-        </p:spPr>
-        <p:txBody>
-          <a:bodyPr wrap="none" lIns="0" rIns="0" tIns="0" bIns="0" anchor="t">
-            <a:spAutoFit/>
-          </a:bodyPr>
-          <a:lstStyle/>
-          <a:p>
-            <a:pPr>
-              <a:lnSpc>
-                <a:spcPct val="108000"/>
-              </a:lnSpc>
-              <a:spcBef>
-                <a:spcPts val="0"/>
-              </a:spcBef>
-              <a:spcAft>
-                <a:spcPts val="0"/>
-              </a:spcAft>
-              <a:defRPr sz="1900" b="0">
-                <a:solidFill>
-                  <a:srgbClr val="151A22"/>
-                </a:solidFill>
-                <a:latin typeface="Arial"/>
-              </a:defRPr>
-            </a:pPr>
-            <a:r>
-              <a:t>An artist-led exhibition and a serious acquisition market, with a generous public welcome.</a:t>
+              <a:t>Artists and galleries would present work for sale alongside commissions and free public programs.</a:t>
             </a:r>
           </a:p>
         </p:txBody>
@@ -10756,7 +10712,7 @@
         </p:nvSpPr>
         <p:spPr>
           <a:xfrm>
-            <a:off x="914400" y="3217926"/>
+            <a:off x="914400" y="2880360"/>
             <a:ext cx="68580" cy="457200"/>
           </a:xfrm>
           <a:prstGeom prst="rect">
@@ -10799,8 +10755,8 @@
         </p:nvSpPr>
         <p:spPr>
           <a:xfrm>
-            <a:off x="1234440" y="3190494"/>
-            <a:ext cx="12252960" cy="1265173"/>
+            <a:off x="1234440" y="2852928"/>
+            <a:ext cx="12252960" cy="1377695"/>
           </a:xfrm>
           <a:prstGeom prst="rect">
             <a:avLst/>
@@ -10844,7 +10800,7 @@
         </p:nvSpPr>
         <p:spPr>
           <a:xfrm>
-            <a:off x="914400" y="4601972"/>
+            <a:off x="914400" y="4376928"/>
             <a:ext cx="68580" cy="457200"/>
           </a:xfrm>
           <a:prstGeom prst="rect">
@@ -10887,8 +10843,8 @@
         </p:nvSpPr>
         <p:spPr>
           <a:xfrm>
-            <a:off x="1234440" y="4574540"/>
-            <a:ext cx="12252960" cy="1265173"/>
+            <a:off x="1234440" y="4349496"/>
+            <a:ext cx="12252960" cy="1377695"/>
           </a:xfrm>
           <a:prstGeom prst="rect">
             <a:avLst/>
@@ -10932,7 +10888,7 @@
         </p:nvSpPr>
         <p:spPr>
           <a:xfrm>
-            <a:off x="914400" y="5986018"/>
+            <a:off x="914400" y="5873496"/>
             <a:ext cx="68580" cy="457200"/>
           </a:xfrm>
           <a:prstGeom prst="rect">
@@ -10975,8 +10931,8 @@
         </p:nvSpPr>
         <p:spPr>
           <a:xfrm>
-            <a:off x="1234440" y="5958586"/>
-            <a:ext cx="12252960" cy="1265173"/>
+            <a:off x="1234440" y="5846063"/>
+            <a:ext cx="12252960" cy="1377695"/>
           </a:xfrm>
           <a:prstGeom prst="rect">
             <a:avLst/>
@@ -11301,7 +11257,7 @@
               </a:defRPr>
             </a:pPr>
             <a:r>
-              <a:t>A room should have a point of view.</a:t>
+              <a:t>Three types of art presentation</a:t>
             </a:r>
           </a:p>
         </p:txBody>
@@ -11346,7 +11302,7 @@
               </a:defRPr>
             </a:pPr>
             <a:r>
-              <a:t>The theme is a framework for authorship, not a request to imitate a famous installation.</a:t>
+              <a:t>Artists and curators develop their own work within the event theme.</a:t>
             </a:r>
           </a:p>
         </p:txBody>
@@ -12300,7 +12256,7 @@
               </a:defRPr>
             </a:pPr>
             <a:r>
-              <a:t>A proposed 60-space edition.</a:t>
+              <a:t>Proposed allocation of 60 spaces</a:t>
             </a:r>
           </a:p>
         </p:txBody>
@@ -12345,7 +12301,7 @@
               </a:defRPr>
             </a:pPr>
             <a:r>
-              <a:t>The functional inventory will be adapted to a surveyed approved footprint.</a:t>
+              <a:t>A survey and site approval must establish how these functions fit.</a:t>
             </a:r>
           </a:p>
         </p:txBody>
@@ -15330,7 +15286,7 @@
               </a:defRPr>
             </a:pPr>
             <a:r>
-              <a:t>CONCEPTUAL FUNCTION GRID / NOT A SURVEYED FLOOR PLAN</a:t>
+              <a:t>PROPOSED PROGRAM FUNCTIONS / SITE SURVEY PENDING</a:t>
             </a:r>
           </a:p>
         </p:txBody>
@@ -15624,7 +15580,7 @@
               </a:defRPr>
             </a:pPr>
             <a:r>
-              <a:t>Artist economics in plain language.</a:t>
+              <a:t>Artist fees and sale proceeds</a:t>
             </a:r>
           </a:p>
         </p:txBody>
@@ -15669,7 +15625,7 @@
               </a:defRPr>
             </a:pPr>
             <a:r>
-              <a:t>No organizer art commission is assumed in the proposal.</a:t>
+              <a:t>The proposal charges zero organizer art commission and budgets pay for commissioned work.</a:t>
             </a:r>
           </a:p>
         </p:txBody>
@@ -15845,7 +15801,7 @@
               </a:defRPr>
             </a:pPr>
             <a:r>
-              <a:t>Sales remain with the</a:t>
+              <a:t>The seller receives sale</a:t>
             </a:r>
           </a:p>
           <a:p>
@@ -15867,7 +15823,7 @@
               </a:defRPr>
             </a:pPr>
             <a:r>
-              <a:t>authorized seller;</a:t>
+              <a:t>proceeds and discloses</a:t>
             </a:r>
           </a:p>
           <a:p>
@@ -15911,7 +15867,7 @@
               </a:defRPr>
             </a:pPr>
             <a:r>
-              <a:t>external costs are disclosed.</a:t>
+              <a:t>external costs.</a:t>
             </a:r>
           </a:p>
         </p:txBody>
@@ -16087,7 +16043,7 @@
               </a:defRPr>
             </a:pPr>
             <a:r>
-              <a:t>Commissions, teaching and</a:t>
+              <a:t>Pay for commissions,</a:t>
             </a:r>
           </a:p>
           <a:p>
@@ -16109,7 +16065,7 @@
               </a:defRPr>
             </a:pPr>
             <a:r>
-              <a:t>direct-artist scopes are</a:t>
+              <a:t>teaching and direct-artist work</a:t>
             </a:r>
           </a:p>
           <a:p>
@@ -16131,29 +16087,7 @@
               </a:defRPr>
             </a:pPr>
             <a:r>
-              <a:t>funded contracts, not</a:t>
-            </a:r>
-          </a:p>
-          <a:p>
-            <a:pPr>
-              <a:lnSpc>
-                <a:spcPct val="108000"/>
-              </a:lnSpc>
-              <a:spcBef>
-                <a:spcPts val="0"/>
-              </a:spcBef>
-              <a:spcAft>
-                <a:spcPts val="0"/>
-              </a:spcAft>
-              <a:defRPr sz="2100" b="0">
-                <a:solidFill>
-                  <a:srgbClr val="151A22"/>
-                </a:solidFill>
-                <a:latin typeface="Arial"/>
-              </a:defRPr>
-            </a:pPr>
-            <a:r>
-              <a:t>exposure promises.</a:t>
+              <a:t>through funded contracts.</a:t>
             </a:r>
           </a:p>
         </p:txBody>
@@ -16667,7 +16601,7 @@
               </a:defRPr>
             </a:pPr>
             <a:r>
-              <a:t>A gallery-service offer to test.</a:t>
+              <a:t>Optional gallery services</a:t>
             </a:r>
           </a:p>
         </p:txBody>
@@ -16712,7 +16646,7 @@
               </a:defRPr>
             </a:pPr>
             <a:r>
-              <a:t>Optional paid services require a specific value proposition and agreed refund/earning terms.</a:t>
+              <a:t>Define the deliverables and refund terms, then test whether galleries will buy the package.</a:t>
             </a:r>
           </a:p>
         </p:txBody>
@@ -16888,7 +16822,7 @@
               </a:defRPr>
             </a:pPr>
             <a:r>
-              <a:t>Illustrative premium-service</a:t>
+              <a:t>Proposed service-package</a:t>
             </a:r>
           </a:p>
           <a:p>
@@ -16910,7 +16844,7 @@
               </a:defRPr>
             </a:pPr>
             <a:r>
-              <a:t>package</a:t>
+              <a:t>price</a:t>
             </a:r>
           </a:p>
         </p:txBody>
@@ -17086,7 +17020,7 @@
               </a:defRPr>
             </a:pPr>
             <a:r>
-              <a:t>Assumed package</a:t>
+              <a:t>Package-purchase</a:t>
             </a:r>
           </a:p>
           <a:p>
@@ -17108,7 +17042,7 @@
               </a:defRPr>
             </a:pPr>
             <a:r>
-              <a:t>purchasers; uptake</a:t>
+              <a:t>assumption. Demand remains</a:t>
             </a:r>
           </a:p>
           <a:p>
@@ -17130,7 +17064,7 @@
               </a:defRPr>
             </a:pPr>
             <a:r>
-              <a:t>unvalidated</a:t>
+              <a:t>unknown</a:t>
             </a:r>
           </a:p>
         </p:txBody>
@@ -17622,7 +17556,7 @@
               </a:defRPr>
             </a:pPr>
             <a:r>
-              <a:t>Support direct artists.</a:t>
+              <a:t>Direct-artist salons and stipends</a:t>
             </a:r>
           </a:p>
         </p:txBody>
@@ -17667,7 +17601,7 @@
               </a:defRPr>
             </a:pPr>
             <a:r>
-              <a:t>Proposed fee envelopes—not accepted commissions or guaranteed grants.</a:t>
+              <a:t>These fee budgets need accepted scopes and funding before any commission.</a:t>
             </a:r>
           </a:p>
         </p:txBody>
@@ -18533,7 +18467,7 @@
               </a:defRPr>
             </a:pPr>
             <a:r>
-              <a:t>Build a purchase-ready catalogue.</a:t>
+              <a:t>Catalog and buyer targets</a:t>
             </a:r>
           </a:p>
         </p:txBody>
@@ -18578,7 +18512,7 @@
               </a:defRPr>
             </a:pPr>
             <a:r>
-              <a:t>Targets depend on signed seller authority, rights and real inventory.</a:t>
+              <a:t>Confirm seller authority, image rights and stock before publishing work.</a:t>
             </a:r>
           </a:p>
         </p:txBody>
@@ -19444,7 +19378,7 @@
               </a:defRPr>
             </a:pPr>
             <a:r>
-              <a:t>Public culture and serious looking.</a:t>
+              <a:t>Preview, public and learning programs</a:t>
             </a:r>
           </a:p>
         </p:txBody>
@@ -19489,7 +19423,7 @@
               </a:defRPr>
             </a:pPr>
             <a:r>
-              <a:t>A proposed seven-day rhythm supports professional attention and broader discovery.</a:t>
+              <a:t>The proposed week gives buyers appointment time and visitors free access to core art.</a:t>
             </a:r>
           </a:p>
         </p:txBody>
